--- a/courses/theory/slides/lec08-predlogic.pptx
+++ b/courses/theory/slides/lec08-predlogic.pptx
@@ -17628,10 +17628,18 @@
           <a:p>
             <a:pPr algn="ctr"/>
             <a:r>
-              <a:rPr kumimoji="1" lang="en-US" altLang="zh-CN" dirty="0"/>
+              <a:rPr kumimoji="1" lang="en-US" altLang="zh-CN" dirty="0">
+                <a:solidFill>
+                  <a:schemeClr val="tx1"/>
+                </a:solidFill>
+              </a:rPr>
               <a:t>A</a:t>
             </a:r>
-            <a:endParaRPr kumimoji="1" lang="zh-CN" altLang="en-US" dirty="0"/>
+            <a:endParaRPr kumimoji="1" lang="zh-CN" altLang="en-US" dirty="0">
+              <a:solidFill>
+                <a:schemeClr val="tx1"/>
+              </a:solidFill>
+            </a:endParaRPr>
           </a:p>
         </p:txBody>
       </p:sp>
@@ -19905,10 +19913,18 @@
           <a:p>
             <a:pPr algn="ctr"/>
             <a:r>
-              <a:rPr kumimoji="1" lang="en-US" altLang="zh-CN" dirty="0"/>
+              <a:rPr kumimoji="1" lang="en-US" altLang="zh-CN" dirty="0">
+                <a:solidFill>
+                  <a:schemeClr val="tx1"/>
+                </a:solidFill>
+              </a:rPr>
               <a:t>A</a:t>
             </a:r>
-            <a:endParaRPr kumimoji="1" lang="zh-CN" altLang="en-US" dirty="0"/>
+            <a:endParaRPr kumimoji="1" lang="zh-CN" altLang="en-US" dirty="0">
+              <a:solidFill>
+                <a:schemeClr val="tx1"/>
+              </a:solidFill>
+            </a:endParaRPr>
           </a:p>
         </p:txBody>
       </p:sp>
@@ -26553,7 +26569,7 @@
             </a:r>
             <a:r>
               <a:rPr kumimoji="1" lang="en-US" altLang="zh-CN" sz="2400" dirty="0"/>
-              <a:t>new</a:t>
+              <a:t>variables</a:t>
             </a:r>
             <a:r>
               <a:rPr kumimoji="1" lang="zh-CN" altLang="en-US" sz="2400" dirty="0"/>
@@ -26561,7 +26577,7 @@
             </a:r>
             <a:r>
               <a:rPr kumimoji="1" lang="en-US" altLang="zh-CN" sz="2400" dirty="0"/>
-              <a:t>variables</a:t>
+              <a:t>and</a:t>
             </a:r>
             <a:r>
               <a:rPr kumimoji="1" lang="zh-CN" altLang="en-US" sz="2400" dirty="0"/>
@@ -26569,15 +26585,23 @@
             </a:r>
             <a:r>
               <a:rPr kumimoji="1" lang="en-US" altLang="zh-CN" sz="2400" dirty="0"/>
-              <a:t>and</a:t>
+              <a:t>functions</a:t>
             </a:r>
             <a:r>
               <a:rPr kumimoji="1" lang="zh-CN" altLang="en-US" sz="2400" dirty="0"/>
               <a:t> </a:t>
             </a:r>
             <a:r>
+              <a:rPr kumimoji="1" lang="en-US" altLang="zh-CN" sz="2400" dirty="0" err="1"/>
+              <a:t>w.r.t.</a:t>
+            </a:r>
+            <a:r>
+              <a:rPr kumimoji="1" lang="zh-CN" altLang="en-US" sz="2400" dirty="0"/>
+              <a:t> </a:t>
+            </a:r>
+            <a:r>
               <a:rPr kumimoji="1" lang="en-US" altLang="zh-CN" sz="2400" dirty="0"/>
-              <a:t>functions</a:t>
+              <a:t>"sort”</a:t>
             </a:r>
           </a:p>
           <a:p>
@@ -26670,7 +26694,15 @@
               <a:t> </a:t>
             </a:r>
             <a:r>
-              <a:rPr kumimoji="1" lang="en-US" altLang="zh-CN" sz="2000" dirty="0" err="1"/>
+              <a:rPr kumimoji="1" lang="en-US" altLang="zh-CN" sz="2000" dirty="0"/>
+              <a:t>named</a:t>
+            </a:r>
+            <a:r>
+              <a:rPr kumimoji="1" lang="zh-CN" altLang="en-US" sz="2000"/>
+              <a:t> </a:t>
+            </a:r>
+            <a:r>
+              <a:rPr kumimoji="1" lang="en-US" altLang="zh-CN" sz="2000"/>
               <a:t>zhangsan</a:t>
             </a:r>
             <a:r>

--- a/courses/theory/slides/lec08-predlogic.pptx
+++ b/courses/theory/slides/lec08-predlogic.pptx
@@ -26698,11 +26698,11 @@
               <a:t>named</a:t>
             </a:r>
             <a:r>
-              <a:rPr kumimoji="1" lang="zh-CN" altLang="en-US" sz="2000"/>
+              <a:rPr kumimoji="1" lang="zh-CN" altLang="en-US" sz="2000" dirty="0"/>
               <a:t> </a:t>
             </a:r>
             <a:r>
-              <a:rPr kumimoji="1" lang="en-US" altLang="zh-CN" sz="2000"/>
+              <a:rPr kumimoji="1" lang="en-US" altLang="zh-CN" sz="2000" dirty="0" err="1"/>
               <a:t>zhangsan</a:t>
             </a:r>
             <a:r>
